--- a/@Materi Kuliah/Materi_Analisis_Teks/Presentasi_Analisis_Teks_Profesional_dari_HTML.pptx
+++ b/@Materi Kuliah/Materi_Analisis_Teks/Presentasi_Analisis_Teks_Profesional_dari_HTML.pptx
@@ -2,131 +2,36 @@
 <file path=ppt/presentation.xml><?xml version="1.0" encoding="utf-8"?>
 <p:presentation xmlns:p="http://schemas.openxmlformats.org/presentationml/2006/main">
   <p:sldMasterIdLst>
-    <p:sldMasterId xmlns:r="http://schemas.openxmlformats.org/officeDocument/2006/relationships" id="2147483648" r:id="R21d0a729be204a51"/>
+    <p:sldMasterId xmlns:r="http://schemas.openxmlformats.org/officeDocument/2006/relationships" id="2147483648" r:id="R84fc1472fe1348b9"/>
   </p:sldMasterIdLst>
   <p:notesMasterIdLst>
-    <p:notesMasterId xmlns:r="http://schemas.openxmlformats.org/officeDocument/2006/relationships" r:id="R8e50878fd7444ef2"/>
+    <p:notesMasterId xmlns:r="http://schemas.openxmlformats.org/officeDocument/2006/relationships" r:id="R569f1a64c6914f1d"/>
   </p:notesMasterIdLst>
   <p:sldIdLst>
-    <p:sldId xmlns:r="http://schemas.openxmlformats.org/officeDocument/2006/relationships" id="256" r:id="R5c49d8eebe09441c"/>
-    <p:sldId xmlns:r="http://schemas.openxmlformats.org/officeDocument/2006/relationships" id="257" r:id="Rb204626d0a424e56"/>
-    <p:sldId xmlns:r="http://schemas.openxmlformats.org/officeDocument/2006/relationships" id="258" r:id="R80febfaa84744b67"/>
-    <p:sldId xmlns:r="http://schemas.openxmlformats.org/officeDocument/2006/relationships" id="259" r:id="R77f6022dae4b44b3"/>
-    <p:sldId xmlns:r="http://schemas.openxmlformats.org/officeDocument/2006/relationships" id="260" r:id="Rc705df9b68b34cba"/>
-    <p:sldId xmlns:r="http://schemas.openxmlformats.org/officeDocument/2006/relationships" id="261" r:id="Rd4b9ce70737f473c"/>
-    <p:sldId xmlns:r="http://schemas.openxmlformats.org/officeDocument/2006/relationships" id="262" r:id="R95d267e996cf4ff1"/>
-    <p:sldId xmlns:r="http://schemas.openxmlformats.org/officeDocument/2006/relationships" id="263" r:id="Ra508c706805e49fe"/>
-    <p:sldId xmlns:r="http://schemas.openxmlformats.org/officeDocument/2006/relationships" id="264" r:id="Rdf99cf60bd624a12"/>
-    <p:sldId xmlns:r="http://schemas.openxmlformats.org/officeDocument/2006/relationships" id="265" r:id="Ra1fe03aa61b54dd3"/>
-    <p:sldId xmlns:r="http://schemas.openxmlformats.org/officeDocument/2006/relationships" id="266" r:id="R0587747c04e044ac"/>
-    <p:sldId xmlns:r="http://schemas.openxmlformats.org/officeDocument/2006/relationships" id="267" r:id="Rce5bf86320254d0f"/>
-    <p:sldId xmlns:r="http://schemas.openxmlformats.org/officeDocument/2006/relationships" id="268" r:id="Ra770615718c34fad"/>
-    <p:sldId xmlns:r="http://schemas.openxmlformats.org/officeDocument/2006/relationships" id="269" r:id="Rd7bc4c446a2946fc"/>
-    <p:sldId xmlns:r="http://schemas.openxmlformats.org/officeDocument/2006/relationships" id="270" r:id="Re7e66ad01a984d0a"/>
-    <p:sldId xmlns:r="http://schemas.openxmlformats.org/officeDocument/2006/relationships" id="271" r:id="Rf3b8ca0aa1c1411a"/>
-    <p:sldId xmlns:r="http://schemas.openxmlformats.org/officeDocument/2006/relationships" id="272" r:id="R14a15b90a00c49a6"/>
-    <p:sldId xmlns:r="http://schemas.openxmlformats.org/officeDocument/2006/relationships" id="273" r:id="R47738cd7ae624094"/>
-    <p:sldId xmlns:r="http://schemas.openxmlformats.org/officeDocument/2006/relationships" id="274" r:id="Rac98f5e7347e440d"/>
-    <p:sldId xmlns:r="http://schemas.openxmlformats.org/officeDocument/2006/relationships" id="275" r:id="Rc3bf7a54acdf4b17"/>
-    <p:sldId xmlns:r="http://schemas.openxmlformats.org/officeDocument/2006/relationships" id="276" r:id="R5f980ec8f03f49b4"/>
+    <p:sldId xmlns:r="http://schemas.openxmlformats.org/officeDocument/2006/relationships" id="256" r:id="Re10a5cc995dc40bd"/>
+    <p:sldId xmlns:r="http://schemas.openxmlformats.org/officeDocument/2006/relationships" id="257" r:id="R4307a558fe8b49f0"/>
+    <p:sldId xmlns:r="http://schemas.openxmlformats.org/officeDocument/2006/relationships" id="258" r:id="R0c48cd736d5d49df"/>
+    <p:sldId xmlns:r="http://schemas.openxmlformats.org/officeDocument/2006/relationships" id="259" r:id="Rffb23f2d3b624cb0"/>
+    <p:sldId xmlns:r="http://schemas.openxmlformats.org/officeDocument/2006/relationships" id="260" r:id="R33adc2e5e9c2496a"/>
+    <p:sldId xmlns:r="http://schemas.openxmlformats.org/officeDocument/2006/relationships" id="261" r:id="Ra9fe163762724913"/>
+    <p:sldId xmlns:r="http://schemas.openxmlformats.org/officeDocument/2006/relationships" id="262" r:id="Rc908fa0e07404495"/>
+    <p:sldId xmlns:r="http://schemas.openxmlformats.org/officeDocument/2006/relationships" id="263" r:id="Rbcb0d6c2e7a24cf5"/>
+    <p:sldId xmlns:r="http://schemas.openxmlformats.org/officeDocument/2006/relationships" id="264" r:id="Rd1405d4f50114bd0"/>
+    <p:sldId xmlns:r="http://schemas.openxmlformats.org/officeDocument/2006/relationships" id="265" r:id="R8d629daf7e3440cb"/>
+    <p:sldId xmlns:r="http://schemas.openxmlformats.org/officeDocument/2006/relationships" id="266" r:id="Rd7c07b7bcdca4514"/>
+    <p:sldId xmlns:r="http://schemas.openxmlformats.org/officeDocument/2006/relationships" id="267" r:id="Rdacaa91d46ee4a27"/>
+    <p:sldId xmlns:r="http://schemas.openxmlformats.org/officeDocument/2006/relationships" id="268" r:id="R2899e88983f14f43"/>
+    <p:sldId xmlns:r="http://schemas.openxmlformats.org/officeDocument/2006/relationships" id="269" r:id="R2c44a1ace54a4a4f"/>
+    <p:sldId xmlns:r="http://schemas.openxmlformats.org/officeDocument/2006/relationships" id="270" r:id="R1aab3aebc47d4d8b"/>
+    <p:sldId xmlns:r="http://schemas.openxmlformats.org/officeDocument/2006/relationships" id="271" r:id="Rc3cf2964037a475c"/>
+    <p:sldId xmlns:r="http://schemas.openxmlformats.org/officeDocument/2006/relationships" id="272" r:id="Rb6e2c91134854943"/>
+    <p:sldId xmlns:r="http://schemas.openxmlformats.org/officeDocument/2006/relationships" id="273" r:id="R85ce0b9daa8e4f3b"/>
+    <p:sldId xmlns:r="http://schemas.openxmlformats.org/officeDocument/2006/relationships" id="274" r:id="Rd05b5f875fc84654"/>
+    <p:sldId xmlns:r="http://schemas.openxmlformats.org/officeDocument/2006/relationships" id="275" r:id="R0dd59e326dbe4f11"/>
+    <p:sldId xmlns:r="http://schemas.openxmlformats.org/officeDocument/2006/relationships" id="276" r:id="R3e10ff7f9c874c82"/>
   </p:sldIdLst>
   <p:sldSz cx="12192000" cy="6858000"/>
   <p:notesSz cx="6858000" cy="9144000"/>
-  <p:defaultTextStyle>
-    <a:defPPr xmlns:a="http://schemas.openxmlformats.org/drawingml/2006/main">
-      <a:defRPr lang="en-US"/>
-    </a:defPPr>
-    <a:lvl1pPr xmlns:a="http://schemas.openxmlformats.org/drawingml/2006/main" marL="0" indent="0" algn="l" defTabSz="914400">
-      <a:defRPr sz="1800" kern="1200">
-        <a:solidFill>
-          <a:schemeClr val="tx1"/>
-        </a:solidFill>
-        <a:latin typeface="+mn-lt"/>
-        <a:ea typeface="+mn-ea"/>
-        <a:cs typeface="+mn-cs"/>
-      </a:defRPr>
-    </a:lvl1pPr>
-    <a:lvl2pPr xmlns:a="http://schemas.openxmlformats.org/drawingml/2006/main" marL="457200" indent="0" algn="l" defTabSz="914400">
-      <a:defRPr sz="1800" kern="1200">
-        <a:solidFill>
-          <a:schemeClr val="tx1"/>
-        </a:solidFill>
-        <a:latin typeface="+mn-lt"/>
-        <a:ea typeface="+mn-ea"/>
-        <a:cs typeface="+mn-cs"/>
-      </a:defRPr>
-    </a:lvl2pPr>
-    <a:lvl3pPr xmlns:a="http://schemas.openxmlformats.org/drawingml/2006/main" marL="914400" indent="0" algn="l" defTabSz="914400">
-      <a:defRPr sz="1800" kern="1200">
-        <a:solidFill>
-          <a:schemeClr val="tx1"/>
-        </a:solidFill>
-        <a:latin typeface="+mn-lt"/>
-        <a:ea typeface="+mn-ea"/>
-        <a:cs typeface="+mn-cs"/>
-      </a:defRPr>
-    </a:lvl3pPr>
-    <a:lvl4pPr xmlns:a="http://schemas.openxmlformats.org/drawingml/2006/main" marL="1371600" indent="0" algn="l" defTabSz="914400">
-      <a:defRPr sz="1800" kern="1200">
-        <a:solidFill>
-          <a:schemeClr val="tx1"/>
-        </a:solidFill>
-        <a:latin typeface="+mn-lt"/>
-        <a:ea typeface="+mn-ea"/>
-        <a:cs typeface="+mn-cs"/>
-      </a:defRPr>
-    </a:lvl4pPr>
-    <a:lvl5pPr xmlns:a="http://schemas.openxmlformats.org/drawingml/2006/main" marL="1828800" indent="0" algn="l" defTabSz="914400">
-      <a:defRPr sz="1800" kern="1200">
-        <a:solidFill>
-          <a:schemeClr val="tx1"/>
-        </a:solidFill>
-        <a:latin typeface="+mn-lt"/>
-        <a:ea typeface="+mn-ea"/>
-        <a:cs typeface="+mn-cs"/>
-      </a:defRPr>
-    </a:lvl5pPr>
-    <a:lvl6pPr xmlns:a="http://schemas.openxmlformats.org/drawingml/2006/main" marL="2286000" indent="0" algn="l" defTabSz="914400">
-      <a:defRPr sz="1800" kern="1200">
-        <a:solidFill>
-          <a:schemeClr val="tx1"/>
-        </a:solidFill>
-        <a:latin typeface="+mn-lt"/>
-        <a:ea typeface="+mn-ea"/>
-        <a:cs typeface="+mn-cs"/>
-      </a:defRPr>
-    </a:lvl6pPr>
-    <a:lvl7pPr xmlns:a="http://schemas.openxmlformats.org/drawingml/2006/main" marL="2743200" indent="0" algn="l" defTabSz="914400">
-      <a:defRPr sz="1800" kern="1200">
-        <a:solidFill>
-          <a:schemeClr val="tx1"/>
-        </a:solidFill>
-        <a:latin typeface="+mn-lt"/>
-        <a:ea typeface="+mn-ea"/>
-        <a:cs typeface="+mn-cs"/>
-      </a:defRPr>
-    </a:lvl7pPr>
-    <a:lvl8pPr xmlns:a="http://schemas.openxmlformats.org/drawingml/2006/main" marL="3200400" indent="0" algn="l" defTabSz="914400">
-      <a:defRPr sz="1800" kern="1200">
-        <a:solidFill>
-          <a:schemeClr val="tx1"/>
-        </a:solidFill>
-        <a:latin typeface="+mn-lt"/>
-        <a:ea typeface="+mn-ea"/>
-        <a:cs typeface="+mn-cs"/>
-      </a:defRPr>
-    </a:lvl8pPr>
-    <a:lvl9pPr xmlns:a="http://schemas.openxmlformats.org/drawingml/2006/main" marL="3657600" indent="0" algn="l" defTabSz="914400">
-      <a:defRPr sz="1800" kern="1200">
-        <a:solidFill>
-          <a:schemeClr val="tx1"/>
-        </a:solidFill>
-        <a:latin typeface="+mn-lt"/>
-        <a:ea typeface="+mn-ea"/>
-        <a:cs typeface="+mn-cs"/>
-      </a:defRPr>
-    </a:lvl9pPr>
-  </p:defaultTextStyle>
 </p:presentation>
 </file>
 
@@ -1453,7 +1358,26 @@
         <p:txBody>
           <a:bodyPr xmlns:a="http://schemas.openxmlformats.org/drawingml/2006/main"/>
           <a:lstStyle xmlns:a="http://schemas.openxmlformats.org/drawingml/2006/main"/>
-          <a:p xmlns:a="http://schemas.openxmlformats.org/drawingml/2006/main"/>
+          <a:p xmlns:a="http://schemas.openxmlformats.org/drawingml/2006/main">
+            <a:r>
+              <a:t>[Sources]</a:t>
+            </a:r>
+          </a:p>
+          <a:p xmlns:a="http://schemas.openxmlformats.org/drawingml/2006/main">
+            <a:r>
+              <a:t>- RPS mata kuliah Revisi AI 2026, Program Studi S2 Statistika Terapan FMIPA Universitas Padjadjaran.</a:t>
+            </a:r>
+          </a:p>
+          <a:p xmlns:a="http://schemas.openxmlformats.org/drawingml/2006/main">
+            <a:r>
+              <a:t>[/Sources]</a:t>
+            </a:r>
+          </a:p>
+          <a:p xmlns:a="http://schemas.openxmlformats.org/drawingml/2006/main">
+            <a:r>
+              <a:t>Penutup: CPL tetap. AI adalah akselerator ketercapaian CPMK/Sub-CPMK, bukan pengganti penalaran statistika. Tekankan kewajiban prompt log ringkas, sumber, kode/notebook reproducible, validasi, dan audit trail.</a:t>
+            </a:r>
+          </a:p>
         </p:txBody>
       </p:sp>
       <p:sp>
@@ -2010,8 +1934,8 @@
   </p:cSld>
   <p:clrMap bg1="lt1" tx1="dk1" bg2="lt2" tx2="dk2" accent1="accent1" accent2="accent2" accent3="accent3" accent4="accent4" accent5="accent5" accent6="accent6" hlink="hlink" folHlink="folHlink"/>
   <p:sldLayoutIdLst>
-    <p:sldLayoutId xmlns:r="http://schemas.openxmlformats.org/officeDocument/2006/relationships" id="2147483649" r:id="R995aa87b12a447f6"/>
-    <p:sldLayoutId xmlns:r="http://schemas.openxmlformats.org/officeDocument/2006/relationships" id="2147483650" r:id="R2bda0ea8d6614413"/>
+    <p:sldLayoutId xmlns:r="http://schemas.openxmlformats.org/officeDocument/2006/relationships" id="2147483649" r:id="R21f465a754a04283"/>
+    <p:sldLayoutId xmlns:r="http://schemas.openxmlformats.org/officeDocument/2006/relationships" id="2147483650" r:id="R78fa458c2c1f4afc"/>
   </p:sldLayoutIdLst>
   <p:hf sldNum="0" hdr="0" ftr="0" dt="0"/>
   <p:txStyles>
@@ -2577,7 +2501,7 @@
           <p:nvPr/>
         </p:nvPicPr>
         <p:blipFill>
-          <a:blip xmlns:r="http://schemas.openxmlformats.org/officeDocument/2006/relationships" xmlns:a="http://schemas.openxmlformats.org/drawingml/2006/main" r:embed="Rff328229df594013"/>
+          <a:blip xmlns:r="http://schemas.openxmlformats.org/officeDocument/2006/relationships" xmlns:a="http://schemas.openxmlformats.org/drawingml/2006/main" r:embed="R2caa9a46a2d14736"/>
           <a:stretch xmlns:a="http://schemas.openxmlformats.org/drawingml/2006/main">
             <a:fillRect l="0" t="0" r="0" b="0"/>
           </a:stretch>
@@ -2723,7 +2647,7 @@
           <p:nvPr/>
         </p:nvPicPr>
         <p:blipFill>
-          <a:blip xmlns:r="http://schemas.openxmlformats.org/officeDocument/2006/relationships" xmlns:a="http://schemas.openxmlformats.org/drawingml/2006/main" r:embed="Rb90a25a933d840a8"/>
+          <a:blip xmlns:r="http://schemas.openxmlformats.org/officeDocument/2006/relationships" xmlns:a="http://schemas.openxmlformats.org/drawingml/2006/main" r:embed="R4558f021701042f5"/>
           <a:stretch xmlns:a="http://schemas.openxmlformats.org/drawingml/2006/main">
             <a:fillRect l="0" t="0" r="0" b="0"/>
           </a:stretch>
@@ -3329,7 +3253,7 @@
           <p:nvPr/>
         </p:nvPicPr>
         <p:blipFill>
-          <a:blip xmlns:r="http://schemas.openxmlformats.org/officeDocument/2006/relationships" xmlns:a="http://schemas.openxmlformats.org/drawingml/2006/main" r:embed="R8e2f270dbfce4e09"/>
+          <a:blip xmlns:r="http://schemas.openxmlformats.org/officeDocument/2006/relationships" xmlns:a="http://schemas.openxmlformats.org/drawingml/2006/main" r:embed="R360460c23f2044c1"/>
           <a:stretch xmlns:a="http://schemas.openxmlformats.org/drawingml/2006/main">
             <a:fillRect l="0" t="0" r="0" b="0"/>
           </a:stretch>
@@ -5479,7 +5403,7 @@
           <p:nvPr/>
         </p:nvPicPr>
         <p:blipFill>
-          <a:blip xmlns:r="http://schemas.openxmlformats.org/officeDocument/2006/relationships" xmlns:a="http://schemas.openxmlformats.org/drawingml/2006/main" r:embed="R8228c0d72ba5486b"/>
+          <a:blip xmlns:r="http://schemas.openxmlformats.org/officeDocument/2006/relationships" xmlns:a="http://schemas.openxmlformats.org/drawingml/2006/main" r:embed="R9a60f81812504aff"/>
           <a:stretch xmlns:a="http://schemas.openxmlformats.org/drawingml/2006/main">
             <a:fillRect l="0" t="0" r="0" b="0"/>
           </a:stretch>
@@ -5758,7 +5682,7 @@
           <p:nvPr/>
         </p:nvPicPr>
         <p:blipFill>
-          <a:blip xmlns:r="http://schemas.openxmlformats.org/officeDocument/2006/relationships" xmlns:a="http://schemas.openxmlformats.org/drawingml/2006/main" r:embed="Rf4a913d585324568"/>
+          <a:blip xmlns:r="http://schemas.openxmlformats.org/officeDocument/2006/relationships" xmlns:a="http://schemas.openxmlformats.org/drawingml/2006/main" r:embed="R8f85cbf780c04471"/>
           <a:stretch xmlns:a="http://schemas.openxmlformats.org/drawingml/2006/main">
             <a:fillRect l="0" t="0" r="0" b="0"/>
           </a:stretch>
@@ -7292,7 +7216,7 @@
           <p:nvPr/>
         </p:nvPicPr>
         <p:blipFill>
-          <a:blip xmlns:r="http://schemas.openxmlformats.org/officeDocument/2006/relationships" xmlns:a="http://schemas.openxmlformats.org/drawingml/2006/main" r:embed="R5291240baa214ac5"/>
+          <a:blip xmlns:r="http://schemas.openxmlformats.org/officeDocument/2006/relationships" xmlns:a="http://schemas.openxmlformats.org/drawingml/2006/main" r:embed="R46d0936f861240dc"/>
           <a:stretch xmlns:a="http://schemas.openxmlformats.org/drawingml/2006/main">
             <a:fillRect l="0" t="0" r="0" b="0"/>
           </a:stretch>
@@ -8461,7 +8385,7 @@
           <p:nvPr/>
         </p:nvPicPr>
         <p:blipFill>
-          <a:blip xmlns:r="http://schemas.openxmlformats.org/officeDocument/2006/relationships" xmlns:a="http://schemas.openxmlformats.org/drawingml/2006/main" r:embed="Ra3f4e5bd78194391"/>
+          <a:blip xmlns:r="http://schemas.openxmlformats.org/officeDocument/2006/relationships" xmlns:a="http://schemas.openxmlformats.org/drawingml/2006/main" r:embed="R9f7a8ecdb2804869"/>
           <a:stretch xmlns:a="http://schemas.openxmlformats.org/drawingml/2006/main">
             <a:fillRect l="0" t="0" r="0" b="0"/>
           </a:stretch>
@@ -9688,7 +9612,7 @@
           <p:nvPr/>
         </p:nvPicPr>
         <p:blipFill>
-          <a:blip xmlns:r="http://schemas.openxmlformats.org/officeDocument/2006/relationships" xmlns:a="http://schemas.openxmlformats.org/drawingml/2006/main" r:embed="R1ecbed3c9c0a43d5"/>
+          <a:blip xmlns:r="http://schemas.openxmlformats.org/officeDocument/2006/relationships" xmlns:a="http://schemas.openxmlformats.org/drawingml/2006/main" r:embed="R4879560ddebd4235"/>
           <a:stretch xmlns:a="http://schemas.openxmlformats.org/drawingml/2006/main">
             <a:fillRect l="0" t="0" r="0" b="0"/>
           </a:stretch>
@@ -10893,7 +10817,7 @@
           <p:nvPr/>
         </p:nvPicPr>
         <p:blipFill>
-          <a:blip xmlns:r="http://schemas.openxmlformats.org/officeDocument/2006/relationships" xmlns:a="http://schemas.openxmlformats.org/drawingml/2006/main" r:embed="R1717b7a763c24d8c"/>
+          <a:blip xmlns:r="http://schemas.openxmlformats.org/officeDocument/2006/relationships" xmlns:a="http://schemas.openxmlformats.org/drawingml/2006/main" r:embed="R06cf3536bf974364"/>
           <a:stretch xmlns:a="http://schemas.openxmlformats.org/drawingml/2006/main">
             <a:fillRect l="0" t="0" r="0" b="0"/>
           </a:stretch>
@@ -11172,7 +11096,7 @@
           <p:nvPr/>
         </p:nvPicPr>
         <p:blipFill>
-          <a:blip xmlns:r="http://schemas.openxmlformats.org/officeDocument/2006/relationships" xmlns:a="http://schemas.openxmlformats.org/drawingml/2006/main" r:embed="R10d4cef8e4c34916"/>
+          <a:blip xmlns:r="http://schemas.openxmlformats.org/officeDocument/2006/relationships" xmlns:a="http://schemas.openxmlformats.org/drawingml/2006/main" r:embed="R9b606b39274049b5"/>
           <a:stretch xmlns:a="http://schemas.openxmlformats.org/drawingml/2006/main">
             <a:fillRect l="0" t="0" r="0" b="0"/>
           </a:stretch>
@@ -12717,7 +12641,7 @@
           <p:nvPr/>
         </p:nvPicPr>
         <p:blipFill>
-          <a:blip xmlns:r="http://schemas.openxmlformats.org/officeDocument/2006/relationships" xmlns:a="http://schemas.openxmlformats.org/drawingml/2006/main" r:embed="R4e21814d779d43bd"/>
+          <a:blip xmlns:r="http://schemas.openxmlformats.org/officeDocument/2006/relationships" xmlns:a="http://schemas.openxmlformats.org/drawingml/2006/main" r:embed="Re4d7aaf1af6c4a93"/>
           <a:stretch xmlns:a="http://schemas.openxmlformats.org/drawingml/2006/main">
             <a:fillRect l="0" t="0" r="0" b="0"/>
           </a:stretch>
@@ -14734,7 +14658,7 @@
           <p:nvPr/>
         </p:nvPicPr>
         <p:blipFill>
-          <a:blip xmlns:r="http://schemas.openxmlformats.org/officeDocument/2006/relationships" xmlns:a="http://schemas.openxmlformats.org/drawingml/2006/main" r:embed="R7838a7cfccd0481f"/>
+          <a:blip xmlns:r="http://schemas.openxmlformats.org/officeDocument/2006/relationships" xmlns:a="http://schemas.openxmlformats.org/drawingml/2006/main" r:embed="Rbb232e4839f2412d"/>
           <a:stretch xmlns:a="http://schemas.openxmlformats.org/drawingml/2006/main">
             <a:fillRect l="0" t="0" r="0" b="0"/>
           </a:stretch>
@@ -15961,7 +15885,7 @@
           <p:nvPr/>
         </p:nvPicPr>
         <p:blipFill>
-          <a:blip xmlns:r="http://schemas.openxmlformats.org/officeDocument/2006/relationships" xmlns:a="http://schemas.openxmlformats.org/drawingml/2006/main" r:embed="Raf38ad628eed4e06"/>
+          <a:blip xmlns:r="http://schemas.openxmlformats.org/officeDocument/2006/relationships" xmlns:a="http://schemas.openxmlformats.org/drawingml/2006/main" r:embed="Rc4a2d0aa8a594c71"/>
           <a:stretch xmlns:a="http://schemas.openxmlformats.org/drawingml/2006/main">
             <a:fillRect l="0" t="0" r="0" b="0"/>
           </a:stretch>
@@ -17102,7 +17026,7 @@
           <p:nvPr/>
         </p:nvPicPr>
         <p:blipFill>
-          <a:blip xmlns:r="http://schemas.openxmlformats.org/officeDocument/2006/relationships" xmlns:a="http://schemas.openxmlformats.org/drawingml/2006/main" r:embed="R054467dbd9904307"/>
+          <a:blip xmlns:r="http://schemas.openxmlformats.org/officeDocument/2006/relationships" xmlns:a="http://schemas.openxmlformats.org/drawingml/2006/main" r:embed="R0566944e43a147a5"/>
           <a:stretch xmlns:a="http://schemas.openxmlformats.org/drawingml/2006/main">
             <a:fillRect l="0" t="0" r="0" b="0"/>
           </a:stretch>
@@ -18567,7 +18491,7 @@
           <p:nvPr/>
         </p:nvPicPr>
         <p:blipFill>
-          <a:blip xmlns:r="http://schemas.openxmlformats.org/officeDocument/2006/relationships" xmlns:a="http://schemas.openxmlformats.org/drawingml/2006/main" r:embed="R0dc42448330448fa"/>
+          <a:blip xmlns:r="http://schemas.openxmlformats.org/officeDocument/2006/relationships" xmlns:a="http://schemas.openxmlformats.org/drawingml/2006/main" r:embed="Rbad6b596c32a41ab"/>
           <a:stretch xmlns:a="http://schemas.openxmlformats.org/drawingml/2006/main">
             <a:fillRect l="0" t="0" r="0" b="0"/>
           </a:stretch>
@@ -18713,7 +18637,7 @@
           <p:nvPr/>
         </p:nvPicPr>
         <p:blipFill>
-          <a:blip xmlns:r="http://schemas.openxmlformats.org/officeDocument/2006/relationships" xmlns:a="http://schemas.openxmlformats.org/drawingml/2006/main" r:embed="Rfbcdb4d2ebaa4833"/>
+          <a:blip xmlns:r="http://schemas.openxmlformats.org/officeDocument/2006/relationships" xmlns:a="http://schemas.openxmlformats.org/drawingml/2006/main" r:embed="R47bb66ae64ba4d1d"/>
           <a:stretch xmlns:a="http://schemas.openxmlformats.org/drawingml/2006/main">
             <a:fillRect l="0" t="0" r="0" b="0"/>
           </a:stretch>
@@ -18817,7 +18741,7 @@
                 <a:ea typeface="Aptos Display"/>
                 <a:cs typeface="Aptos Display"/>
               </a:rPr>
-              <a:t>Dari data menuju</a:t>
+              <a:t>AI mempercepat proses,</a:t>
             </a:r>
           </a:p>
           <a:p xmlns:a="http://schemas.openxmlformats.org/drawingml/2006/main">
@@ -18833,7 +18757,7 @@
                 <a:ea typeface="Aptos Display"/>
                 <a:cs typeface="Aptos Display"/>
               </a:rPr>
-              <a:t>keputusan yang dapat diuji</a:t>
+              <a:t>penalaran tetap memimpin</a:t>
             </a:r>
           </a:p>
         </p:txBody>
@@ -18900,7 +18824,7 @@
         </p:spPr>
         <p:txBody>
           <a:bodyPr xmlns:a="http://schemas.openxmlformats.org/drawingml/2006/main" wrap="square" lIns="635" tIns="635" rIns="635" bIns="635" anchor="t">
-            <a:normAutofit fontScale="100000"/>
+            <a:normAutofit fontScale="93620"/>
           </a:bodyPr>
           <a:lstStyle xmlns:a="http://schemas.openxmlformats.org/drawingml/2006/main"/>
           <a:p xmlns:a="http://schemas.openxmlformats.org/drawingml/2006/main">
@@ -18916,7 +18840,7 @@
                 <a:ea typeface="Aptos"/>
                 <a:cs typeface="Aptos"/>
               </a:rPr>
-              <a:t>Analisis Teks menghubungkan teori, data, metode, validasi, dan komunikasi untuk menghasilkan keputusan yang sahih, dapat direplikasi, dan bertanggung jawab.</a:t>
+              <a:t>Analisis Teks memadukan teori, data, komputasi, validasi, dan komunikasi. AI mempercepat eksplorasi dan pemeriksaan awal; mahasiswa tetap memverifikasi asumsi, kode, hasil numerik, ketidakpastian, sumber, dan dampak sebelum mengambil keputusan.</a:t>
             </a:r>
           </a:p>
         </p:txBody>
@@ -19086,7 +19010,7 @@
           <p:nvPr/>
         </p:nvPicPr>
         <p:blipFill>
-          <a:blip xmlns:r="http://schemas.openxmlformats.org/officeDocument/2006/relationships" xmlns:a="http://schemas.openxmlformats.org/drawingml/2006/main" r:embed="R807b26327acf4095"/>
+          <a:blip xmlns:r="http://schemas.openxmlformats.org/officeDocument/2006/relationships" xmlns:a="http://schemas.openxmlformats.org/drawingml/2006/main" r:embed="R7dcbb698f1114eba"/>
           <a:stretch xmlns:a="http://schemas.openxmlformats.org/drawingml/2006/main">
             <a:fillRect l="0" t="0" r="0" b="0"/>
           </a:stretch>
@@ -20217,7 +20141,7 @@
           <p:nvPr/>
         </p:nvPicPr>
         <p:blipFill>
-          <a:blip xmlns:r="http://schemas.openxmlformats.org/officeDocument/2006/relationships" xmlns:a="http://schemas.openxmlformats.org/drawingml/2006/main" r:embed="Rfaf8a7a0710c4b64"/>
+          <a:blip xmlns:r="http://schemas.openxmlformats.org/officeDocument/2006/relationships" xmlns:a="http://schemas.openxmlformats.org/drawingml/2006/main" r:embed="R0ffa97be276943bb"/>
           <a:stretch xmlns:a="http://schemas.openxmlformats.org/drawingml/2006/main">
             <a:fillRect l="0" t="0" r="0" b="0"/>
           </a:stretch>
@@ -22321,7 +22245,7 @@
           <p:nvPr/>
         </p:nvPicPr>
         <p:blipFill>
-          <a:blip xmlns:r="http://schemas.openxmlformats.org/officeDocument/2006/relationships" xmlns:a="http://schemas.openxmlformats.org/drawingml/2006/main" r:embed="R8d77c6f9ebca434e"/>
+          <a:blip xmlns:r="http://schemas.openxmlformats.org/officeDocument/2006/relationships" xmlns:a="http://schemas.openxmlformats.org/drawingml/2006/main" r:embed="R2bb5ddbfd2fa4d5d"/>
           <a:stretch xmlns:a="http://schemas.openxmlformats.org/drawingml/2006/main">
             <a:fillRect l="0" t="0" r="0" b="0"/>
           </a:stretch>
@@ -23603,7 +23527,7 @@
           <p:nvPr/>
         </p:nvPicPr>
         <p:blipFill>
-          <a:blip xmlns:r="http://schemas.openxmlformats.org/officeDocument/2006/relationships" xmlns:a="http://schemas.openxmlformats.org/drawingml/2006/main" r:embed="R0eb84a7ec5ed411e"/>
+          <a:blip xmlns:r="http://schemas.openxmlformats.org/officeDocument/2006/relationships" xmlns:a="http://schemas.openxmlformats.org/drawingml/2006/main" r:embed="R61acb3789fbe4f82"/>
           <a:stretch xmlns:a="http://schemas.openxmlformats.org/drawingml/2006/main">
             <a:fillRect l="0" t="0" r="0" b="0"/>
           </a:stretch>
@@ -23882,7 +23806,7 @@
           <p:nvPr/>
         </p:nvPicPr>
         <p:blipFill>
-          <a:blip xmlns:r="http://schemas.openxmlformats.org/officeDocument/2006/relationships" xmlns:a="http://schemas.openxmlformats.org/drawingml/2006/main" r:embed="R9040a6606b1947f4"/>
+          <a:blip xmlns:r="http://schemas.openxmlformats.org/officeDocument/2006/relationships" xmlns:a="http://schemas.openxmlformats.org/drawingml/2006/main" r:embed="R6da50314d65a4b2b"/>
           <a:stretch xmlns:a="http://schemas.openxmlformats.org/drawingml/2006/main">
             <a:fillRect l="0" t="0" r="0" b="0"/>
           </a:stretch>
@@ -25962,7 +25886,7 @@
           <p:nvPr/>
         </p:nvPicPr>
         <p:blipFill>
-          <a:blip xmlns:r="http://schemas.openxmlformats.org/officeDocument/2006/relationships" xmlns:a="http://schemas.openxmlformats.org/drawingml/2006/main" r:embed="R3ede17e91bf343b0"/>
+          <a:blip xmlns:r="http://schemas.openxmlformats.org/officeDocument/2006/relationships" xmlns:a="http://schemas.openxmlformats.org/drawingml/2006/main" r:embed="Rad178d2a800d40d1"/>
           <a:stretch xmlns:a="http://schemas.openxmlformats.org/drawingml/2006/main">
             <a:fillRect l="0" t="0" r="0" b="0"/>
           </a:stretch>
@@ -27375,7 +27299,7 @@
           <p:nvPr/>
         </p:nvPicPr>
         <p:blipFill>
-          <a:blip xmlns:r="http://schemas.openxmlformats.org/officeDocument/2006/relationships" xmlns:a="http://schemas.openxmlformats.org/drawingml/2006/main" r:embed="R8c14825c763947bd"/>
+          <a:blip xmlns:r="http://schemas.openxmlformats.org/officeDocument/2006/relationships" xmlns:a="http://schemas.openxmlformats.org/drawingml/2006/main" r:embed="R9033fe407d714288"/>
           <a:stretch xmlns:a="http://schemas.openxmlformats.org/drawingml/2006/main">
             <a:fillRect l="0" t="0" r="0" b="0"/>
           </a:stretch>
